--- a/output_pptx/Silent_Night.pptx
+++ b/output_pptx/Silent_Night.pptx
@@ -3108,8 +3108,8 @@
         </p:nvSpPr>
         <p:spPr>
           <a:xfrm>
-            <a:off x="594360" y="1837944"/>
-            <a:ext cx="11002975" cy="685800"/>
+            <a:off x="640080" y="1650492"/>
+            <a:ext cx="10911535" cy="731520"/>
           </a:xfrm>
           <a:prstGeom prst="rect">
             <a:avLst/>
@@ -3124,7 +3124,7 @@
           <a:p>
             <a:pPr algn="ctr"/>
             <a:r>
-              <a:rPr sz="4400" b="1" i="0">
+              <a:rPr sz="4800" b="1" i="0">
                 <a:solidFill>
                   <a:srgbClr val="FFFFFF"/>
                 </a:solidFill>
@@ -3143,8 +3143,8 @@
         </p:nvSpPr>
         <p:spPr>
           <a:xfrm>
-            <a:off x="594360" y="2560320"/>
-            <a:ext cx="11002975" cy="384048"/>
+            <a:off x="640080" y="2418588"/>
+            <a:ext cx="10911535" cy="365760"/>
           </a:xfrm>
           <a:prstGeom prst="rect">
             <a:avLst/>
@@ -3161,7 +3161,7 @@
             <a:r>
               <a:rPr sz="2400" b="0" i="1">
                 <a:solidFill>
-                  <a:srgbClr val="B4B4B4"/>
+                  <a:srgbClr val="AAAAAA"/>
                 </a:solidFill>
                 <a:latin typeface="Arial"/>
               </a:rPr>
@@ -3178,8 +3178,8 @@
         </p:nvSpPr>
         <p:spPr>
           <a:xfrm>
-            <a:off x="594360" y="2980944"/>
-            <a:ext cx="11002975" cy="347472"/>
+            <a:off x="640080" y="2985516"/>
+            <a:ext cx="10911535" cy="731520"/>
           </a:xfrm>
           <a:prstGeom prst="rect">
             <a:avLst/>
@@ -3194,13 +3194,13 @@
           <a:p>
             <a:pPr algn="ctr"/>
             <a:r>
-              <a:rPr sz="2000" b="0" i="1">
+              <a:rPr sz="4800" b="1" i="0">
                 <a:solidFill>
-                  <a:srgbClr val="8C8C8C"/>
+                  <a:srgbClr val="FFFFFF"/>
                 </a:solidFill>
                 <a:latin typeface="Arial"/>
               </a:rPr>
-              <a:t/>
+              <a:t>救いの御子は まぶねのなかに</a:t>
             </a:r>
           </a:p>
         </p:txBody>
@@ -3213,8 +3213,8 @@
         </p:nvSpPr>
         <p:spPr>
           <a:xfrm>
-            <a:off x="594360" y="3529584"/>
-            <a:ext cx="11002975" cy="685800"/>
+            <a:off x="640080" y="3753612"/>
+            <a:ext cx="10911535" cy="365760"/>
           </a:xfrm>
           <a:prstGeom prst="rect">
             <a:avLst/>
@@ -3229,13 +3229,13 @@
           <a:p>
             <a:pPr algn="ctr"/>
             <a:r>
-              <a:rPr sz="4400" b="1" i="0">
+              <a:rPr sz="2400" b="0" i="1">
                 <a:solidFill>
-                  <a:srgbClr val="FFFFFF"/>
+                  <a:srgbClr val="AAAAAA"/>
                 </a:solidFill>
                 <a:latin typeface="Arial"/>
               </a:rPr>
-              <a:t>救いの御子は まぶねのなかに</a:t>
+              <a:t>sukui no miko wa mabune no naka ni</a:t>
             </a:r>
           </a:p>
         </p:txBody>
@@ -3248,8 +3248,8 @@
         </p:nvSpPr>
         <p:spPr>
           <a:xfrm>
-            <a:off x="594360" y="4251960"/>
-            <a:ext cx="11002975" cy="384048"/>
+            <a:off x="640080" y="4530852"/>
+            <a:ext cx="10911535" cy="310896"/>
           </a:xfrm>
           <a:prstGeom prst="rect">
             <a:avLst/>
@@ -3264,13 +3264,13 @@
           <a:p>
             <a:pPr algn="ctr"/>
             <a:r>
-              <a:rPr sz="2400" b="0" i="1">
+              <a:rPr sz="2000" b="0" i="1">
                 <a:solidFill>
-                  <a:srgbClr val="B4B4B4"/>
+                  <a:srgbClr val="828282"/>
                 </a:solidFill>
                 <a:latin typeface="Arial"/>
               </a:rPr>
-              <a:t>sukui no miko wa mabune no naka ni</a:t>
+              <a:t>Dorme em paz, ó, Jesus</a:t>
             </a:r>
           </a:p>
         </p:txBody>
@@ -3283,8 +3283,8 @@
         </p:nvSpPr>
         <p:spPr>
           <a:xfrm>
-            <a:off x="594360" y="4672584"/>
-            <a:ext cx="11002975" cy="347472"/>
+            <a:off x="640080" y="4896612"/>
+            <a:ext cx="10911535" cy="310896"/>
           </a:xfrm>
           <a:prstGeom prst="rect">
             <a:avLst/>
@@ -3301,11 +3301,11 @@
             <a:r>
               <a:rPr sz="2000" b="0" i="1">
                 <a:solidFill>
-                  <a:srgbClr val="8C8C8C"/>
+                  <a:srgbClr val="828282"/>
                 </a:solidFill>
                 <a:latin typeface="Arial"/>
               </a:rPr>
-              <a:t/>
+              <a:t>Dorme em paz, ó, Jesus</a:t>
             </a:r>
           </a:p>
         </p:txBody>
@@ -3344,8 +3344,8 @@
         </p:nvSpPr>
         <p:spPr>
           <a:xfrm>
-            <a:off x="594360" y="2683764"/>
-            <a:ext cx="11002975" cy="685800"/>
+            <a:off x="640080" y="2500884"/>
+            <a:ext cx="10911535" cy="731520"/>
           </a:xfrm>
           <a:prstGeom prst="rect">
             <a:avLst/>
@@ -3360,7 +3360,7 @@
           <a:p>
             <a:pPr algn="ctr"/>
             <a:r>
-              <a:rPr sz="4400" b="1" i="0">
+              <a:rPr sz="4800" b="1" i="0">
                 <a:solidFill>
                   <a:srgbClr val="FFFFFF"/>
                 </a:solidFill>
@@ -3379,8 +3379,8 @@
         </p:nvSpPr>
         <p:spPr>
           <a:xfrm>
-            <a:off x="594360" y="3406140"/>
-            <a:ext cx="11002975" cy="384048"/>
+            <a:off x="640080" y="3268980"/>
+            <a:ext cx="10911535" cy="365760"/>
           </a:xfrm>
           <a:prstGeom prst="rect">
             <a:avLst/>
@@ -3397,7 +3397,7 @@
             <a:r>
               <a:rPr sz="2400" b="0" i="1">
                 <a:solidFill>
-                  <a:srgbClr val="B4B4B4"/>
+                  <a:srgbClr val="AAAAAA"/>
                 </a:solidFill>
                 <a:latin typeface="Arial"/>
               </a:rPr>
@@ -3414,8 +3414,8 @@
         </p:nvSpPr>
         <p:spPr>
           <a:xfrm>
-            <a:off x="594360" y="3826764"/>
-            <a:ext cx="11002975" cy="347472"/>
+            <a:off x="640080" y="4046220"/>
+            <a:ext cx="10911535" cy="310896"/>
           </a:xfrm>
           <a:prstGeom prst="rect">
             <a:avLst/>
@@ -3432,11 +3432,11 @@
             <a:r>
               <a:rPr sz="2000" b="0" i="1">
                 <a:solidFill>
-                  <a:srgbClr val="8C8C8C"/>
+                  <a:srgbClr val="828282"/>
                 </a:solidFill>
                 <a:latin typeface="Arial"/>
               </a:rPr>
-              <a:t/>
+              <a:t>Noite feliz, noite feliz</a:t>
             </a:r>
           </a:p>
         </p:txBody>
@@ -3475,8 +3475,8 @@
         </p:nvSpPr>
         <p:spPr>
           <a:xfrm>
-            <a:off x="594360" y="2258568"/>
-            <a:ext cx="11002975" cy="685800"/>
+            <a:off x="640080" y="2052828"/>
+            <a:ext cx="10911535" cy="731520"/>
           </a:xfrm>
           <a:prstGeom prst="rect">
             <a:avLst/>
@@ -3491,7 +3491,7 @@
           <a:p>
             <a:pPr algn="ctr"/>
             <a:r>
-              <a:rPr sz="4400" b="1" i="0">
+              <a:rPr sz="4800" b="1" i="0">
                 <a:solidFill>
                   <a:srgbClr val="FFFFFF"/>
                 </a:solidFill>
@@ -3510,8 +3510,8 @@
         </p:nvSpPr>
         <p:spPr>
           <a:xfrm>
-            <a:off x="594360" y="2980944"/>
-            <a:ext cx="11002975" cy="347472"/>
+            <a:off x="640080" y="2985516"/>
+            <a:ext cx="10911535" cy="731520"/>
           </a:xfrm>
           <a:prstGeom prst="rect">
             <a:avLst/>
@@ -3526,83 +3526,13 @@
           <a:p>
             <a:pPr algn="ctr"/>
             <a:r>
-              <a:rPr sz="2200" b="0" i="1">
-                <a:solidFill>
-                  <a:srgbClr val="8C8C8C"/>
-                </a:solidFill>
-                <a:latin typeface="Arial"/>
-              </a:rPr>
-              <a:t/>
-            </a:r>
-          </a:p>
-        </p:txBody>
-      </p:sp>
-      <p:sp>
-        <p:nvSpPr>
-          <p:cNvPr id="4" name="TextBox 3"/>
-          <p:cNvSpPr txBox="1"/>
-          <p:nvPr/>
-        </p:nvSpPr>
-        <p:spPr>
-          <a:xfrm>
-            <a:off x="594360" y="3529584"/>
-            <a:ext cx="11002975" cy="685800"/>
-          </a:xfrm>
-          <a:prstGeom prst="rect">
-            <a:avLst/>
-          </a:prstGeom>
-          <a:noFill/>
-        </p:spPr>
-        <p:txBody>
-          <a:bodyPr wrap="square">
-            <a:spAutoFit/>
-          </a:bodyPr>
-          <a:lstStyle/>
-          <a:p>
-            <a:pPr algn="ctr"/>
-            <a:r>
-              <a:rPr sz="4400" b="1" i="0">
+              <a:rPr sz="4800" b="1" i="0">
                 <a:solidFill>
                   <a:srgbClr val="FFFFFF"/>
                 </a:solidFill>
                 <a:latin typeface="Arial"/>
               </a:rPr>
               <a:t>Dorme em paz, ó, Jesus</a:t>
-            </a:r>
-          </a:p>
-        </p:txBody>
-      </p:sp>
-      <p:sp>
-        <p:nvSpPr>
-          <p:cNvPr id="5" name="TextBox 4"/>
-          <p:cNvSpPr txBox="1"/>
-          <p:nvPr/>
-        </p:nvSpPr>
-        <p:spPr>
-          <a:xfrm>
-            <a:off x="594360" y="4251960"/>
-            <a:ext cx="11002975" cy="347472"/>
-          </a:xfrm>
-          <a:prstGeom prst="rect">
-            <a:avLst/>
-          </a:prstGeom>
-          <a:noFill/>
-        </p:spPr>
-        <p:txBody>
-          <a:bodyPr wrap="square">
-            <a:spAutoFit/>
-          </a:bodyPr>
-          <a:lstStyle/>
-          <a:p>
-            <a:pPr algn="ctr"/>
-            <a:r>
-              <a:rPr sz="2200" b="0" i="1">
-                <a:solidFill>
-                  <a:srgbClr val="8C8C8C"/>
-                </a:solidFill>
-                <a:latin typeface="Arial"/>
-              </a:rPr>
-              <a:t/>
             </a:r>
           </a:p>
         </p:txBody>
@@ -3641,8 +3571,8 @@
         </p:nvSpPr>
         <p:spPr>
           <a:xfrm>
-            <a:off x="594360" y="2258568"/>
-            <a:ext cx="11002975" cy="685800"/>
+            <a:off x="640080" y="2052828"/>
+            <a:ext cx="10911535" cy="731520"/>
           </a:xfrm>
           <a:prstGeom prst="rect">
             <a:avLst/>
@@ -3657,7 +3587,7 @@
           <a:p>
             <a:pPr algn="ctr"/>
             <a:r>
-              <a:rPr sz="4400" b="1" i="0">
+              <a:rPr sz="4800" b="1" i="0">
                 <a:solidFill>
                   <a:srgbClr val="FFFFFF"/>
                 </a:solidFill>
@@ -3676,8 +3606,8 @@
         </p:nvSpPr>
         <p:spPr>
           <a:xfrm>
-            <a:off x="594360" y="2980944"/>
-            <a:ext cx="11002975" cy="347472"/>
+            <a:off x="640080" y="2985516"/>
+            <a:ext cx="10911535" cy="731520"/>
           </a:xfrm>
           <a:prstGeom prst="rect">
             <a:avLst/>
@@ -3692,83 +3622,13 @@
           <a:p>
             <a:pPr algn="ctr"/>
             <a:r>
-              <a:rPr sz="2200" b="0" i="1">
-                <a:solidFill>
-                  <a:srgbClr val="8C8C8C"/>
-                </a:solidFill>
-                <a:latin typeface="Arial"/>
-              </a:rPr>
-              <a:t/>
-            </a:r>
-          </a:p>
-        </p:txBody>
-      </p:sp>
-      <p:sp>
-        <p:nvSpPr>
-          <p:cNvPr id="4" name="TextBox 3"/>
-          <p:cNvSpPr txBox="1"/>
-          <p:nvPr/>
-        </p:nvSpPr>
-        <p:spPr>
-          <a:xfrm>
-            <a:off x="594360" y="3529584"/>
-            <a:ext cx="11002975" cy="685800"/>
-          </a:xfrm>
-          <a:prstGeom prst="rect">
-            <a:avLst/>
-          </a:prstGeom>
-          <a:noFill/>
-        </p:spPr>
-        <p:txBody>
-          <a:bodyPr wrap="square">
-            <a:spAutoFit/>
-          </a:bodyPr>
-          <a:lstStyle/>
-          <a:p>
-            <a:pPr algn="ctr"/>
-            <a:r>
-              <a:rPr sz="4400" b="1" i="0">
+              <a:rPr sz="4800" b="1" i="0">
                 <a:solidFill>
                   <a:srgbClr val="FFFFFF"/>
                 </a:solidFill>
                 <a:latin typeface="Arial"/>
               </a:rPr>
               <a:t>Ó, Jesus, Deus da luz</a:t>
-            </a:r>
-          </a:p>
-        </p:txBody>
-      </p:sp>
-      <p:sp>
-        <p:nvSpPr>
-          <p:cNvPr id="5" name="TextBox 4"/>
-          <p:cNvSpPr txBox="1"/>
-          <p:nvPr/>
-        </p:nvSpPr>
-        <p:spPr>
-          <a:xfrm>
-            <a:off x="594360" y="4251960"/>
-            <a:ext cx="11002975" cy="347472"/>
-          </a:xfrm>
-          <a:prstGeom prst="rect">
-            <a:avLst/>
-          </a:prstGeom>
-          <a:noFill/>
-        </p:spPr>
-        <p:txBody>
-          <a:bodyPr wrap="square">
-            <a:spAutoFit/>
-          </a:bodyPr>
-          <a:lstStyle/>
-          <a:p>
-            <a:pPr algn="ctr"/>
-            <a:r>
-              <a:rPr sz="2200" b="0" i="1">
-                <a:solidFill>
-                  <a:srgbClr val="8C8C8C"/>
-                </a:solidFill>
-                <a:latin typeface="Arial"/>
-              </a:rPr>
-              <a:t/>
             </a:r>
           </a:p>
         </p:txBody>
@@ -3807,8 +3667,8 @@
         </p:nvSpPr>
         <p:spPr>
           <a:xfrm>
-            <a:off x="594360" y="2258568"/>
-            <a:ext cx="11002975" cy="685800"/>
+            <a:off x="640080" y="2052828"/>
+            <a:ext cx="10911535" cy="731520"/>
           </a:xfrm>
           <a:prstGeom prst="rect">
             <a:avLst/>
@@ -3823,7 +3683,7 @@
           <a:p>
             <a:pPr algn="ctr"/>
             <a:r>
-              <a:rPr sz="4400" b="1" i="0">
+              <a:rPr sz="4800" b="1" i="0">
                 <a:solidFill>
                   <a:srgbClr val="FFFFFF"/>
                 </a:solidFill>
@@ -3842,8 +3702,8 @@
         </p:nvSpPr>
         <p:spPr>
           <a:xfrm>
-            <a:off x="594360" y="2980944"/>
-            <a:ext cx="11002975" cy="347472"/>
+            <a:off x="640080" y="2985516"/>
+            <a:ext cx="10911535" cy="731520"/>
           </a:xfrm>
           <a:prstGeom prst="rect">
             <a:avLst/>
@@ -3858,83 +3718,13 @@
           <a:p>
             <a:pPr algn="ctr"/>
             <a:r>
-              <a:rPr sz="2200" b="0" i="1">
-                <a:solidFill>
-                  <a:srgbClr val="8C8C8C"/>
-                </a:solidFill>
-                <a:latin typeface="Arial"/>
-              </a:rPr>
-              <a:t/>
-            </a:r>
-          </a:p>
-        </p:txBody>
-      </p:sp>
-      <p:sp>
-        <p:nvSpPr>
-          <p:cNvPr id="4" name="TextBox 3"/>
-          <p:cNvSpPr txBox="1"/>
-          <p:nvPr/>
-        </p:nvSpPr>
-        <p:spPr>
-          <a:xfrm>
-            <a:off x="594360" y="3529584"/>
-            <a:ext cx="11002975" cy="685800"/>
-          </a:xfrm>
-          <a:prstGeom prst="rect">
-            <a:avLst/>
-          </a:prstGeom>
-          <a:noFill/>
-        </p:spPr>
-        <p:txBody>
-          <a:bodyPr wrap="square">
-            <a:spAutoFit/>
-          </a:bodyPr>
-          <a:lstStyle/>
-          <a:p>
-            <a:pPr algn="ctr"/>
-            <a:r>
-              <a:rPr sz="4400" b="1" i="0">
+              <a:rPr sz="4800" b="1" i="0">
                 <a:solidFill>
                   <a:srgbClr val="FFFFFF"/>
                 </a:solidFill>
                 <a:latin typeface="Arial"/>
               </a:rPr>
               <a:t>Que quiseste nascer nosso irmão</a:t>
-            </a:r>
-          </a:p>
-        </p:txBody>
-      </p:sp>
-      <p:sp>
-        <p:nvSpPr>
-          <p:cNvPr id="5" name="TextBox 4"/>
-          <p:cNvSpPr txBox="1"/>
-          <p:nvPr/>
-        </p:nvSpPr>
-        <p:spPr>
-          <a:xfrm>
-            <a:off x="594360" y="4251960"/>
-            <a:ext cx="11002975" cy="347472"/>
-          </a:xfrm>
-          <a:prstGeom prst="rect">
-            <a:avLst/>
-          </a:prstGeom>
-          <a:noFill/>
-        </p:spPr>
-        <p:txBody>
-          <a:bodyPr wrap="square">
-            <a:spAutoFit/>
-          </a:bodyPr>
-          <a:lstStyle/>
-          <a:p>
-            <a:pPr algn="ctr"/>
-            <a:r>
-              <a:rPr sz="2200" b="0" i="1">
-                <a:solidFill>
-                  <a:srgbClr val="8C8C8C"/>
-                </a:solidFill>
-                <a:latin typeface="Arial"/>
-              </a:rPr>
-              <a:t/>
             </a:r>
           </a:p>
         </p:txBody>

--- a/output_pptx/Silent_Night.pptx
+++ b/output_pptx/Silent_Night.pptx
@@ -3537,6 +3537,76 @@
           </a:p>
         </p:txBody>
       </p:sp>
+      <p:sp>
+        <p:nvSpPr>
+          <p:cNvPr id="4" name="TextBox 3"/>
+          <p:cNvSpPr txBox="1"/>
+          <p:nvPr/>
+        </p:nvSpPr>
+        <p:spPr>
+          <a:xfrm>
+            <a:off x="640080" y="4128516"/>
+            <a:ext cx="10911535" cy="310896"/>
+          </a:xfrm>
+          <a:prstGeom prst="rect">
+            <a:avLst/>
+          </a:prstGeom>
+          <a:noFill/>
+        </p:spPr>
+        <p:txBody>
+          <a:bodyPr wrap="square">
+            <a:spAutoFit/>
+          </a:bodyPr>
+          <a:lstStyle/>
+          <a:p>
+            <a:pPr algn="ctr"/>
+            <a:r>
+              <a:rPr sz="2000" b="0" i="0">
+                <a:solidFill>
+                  <a:srgbClr val="828282"/>
+                </a:solidFill>
+                <a:latin typeface="Arial"/>
+              </a:rPr>
+              <a:t>安らかに眠りたまえ、イエスよ</a:t>
+            </a:r>
+          </a:p>
+        </p:txBody>
+      </p:sp>
+      <p:sp>
+        <p:nvSpPr>
+          <p:cNvPr id="5" name="TextBox 4"/>
+          <p:cNvSpPr txBox="1"/>
+          <p:nvPr/>
+        </p:nvSpPr>
+        <p:spPr>
+          <a:xfrm>
+            <a:off x="640080" y="4494276"/>
+            <a:ext cx="10911535" cy="310896"/>
+          </a:xfrm>
+          <a:prstGeom prst="rect">
+            <a:avLst/>
+          </a:prstGeom>
+          <a:noFill/>
+        </p:spPr>
+        <p:txBody>
+          <a:bodyPr wrap="square">
+            <a:spAutoFit/>
+          </a:bodyPr>
+          <a:lstStyle/>
+          <a:p>
+            <a:pPr algn="ctr"/>
+            <a:r>
+              <a:rPr sz="2000" b="0" i="0">
+                <a:solidFill>
+                  <a:srgbClr val="828282"/>
+                </a:solidFill>
+                <a:latin typeface="Arial"/>
+              </a:rPr>
+              <a:t>安らかに眠りたまえ、イエスよ</a:t>
+            </a:r>
+          </a:p>
+        </p:txBody>
+      </p:sp>
     </p:spTree>
   </p:cSld>
   <p:clrMapOvr>
@@ -3633,6 +3703,76 @@
           </a:p>
         </p:txBody>
       </p:sp>
+      <p:sp>
+        <p:nvSpPr>
+          <p:cNvPr id="4" name="TextBox 3"/>
+          <p:cNvSpPr txBox="1"/>
+          <p:nvPr/>
+        </p:nvSpPr>
+        <p:spPr>
+          <a:xfrm>
+            <a:off x="640080" y="4128516"/>
+            <a:ext cx="10911535" cy="310896"/>
+          </a:xfrm>
+          <a:prstGeom prst="rect">
+            <a:avLst/>
+          </a:prstGeom>
+          <a:noFill/>
+        </p:spPr>
+        <p:txBody>
+          <a:bodyPr wrap="square">
+            <a:spAutoFit/>
+          </a:bodyPr>
+          <a:lstStyle/>
+          <a:p>
+            <a:pPr algn="ctr"/>
+            <a:r>
+              <a:rPr sz="2000" b="0" i="0">
+                <a:solidFill>
+                  <a:srgbClr val="828282"/>
+                </a:solidFill>
+                <a:latin typeface="Arial"/>
+              </a:rPr>
+              <a:t>幸せな夜、幸せな夜</a:t>
+            </a:r>
+          </a:p>
+        </p:txBody>
+      </p:sp>
+      <p:sp>
+        <p:nvSpPr>
+          <p:cNvPr id="5" name="TextBox 4"/>
+          <p:cNvSpPr txBox="1"/>
+          <p:nvPr/>
+        </p:nvSpPr>
+        <p:spPr>
+          <a:xfrm>
+            <a:off x="640080" y="4494276"/>
+            <a:ext cx="10911535" cy="310896"/>
+          </a:xfrm>
+          <a:prstGeom prst="rect">
+            <a:avLst/>
+          </a:prstGeom>
+          <a:noFill/>
+        </p:spPr>
+        <p:txBody>
+          <a:bodyPr wrap="square">
+            <a:spAutoFit/>
+          </a:bodyPr>
+          <a:lstStyle/>
+          <a:p>
+            <a:pPr algn="ctr"/>
+            <a:r>
+              <a:rPr sz="2000" b="0" i="0">
+                <a:solidFill>
+                  <a:srgbClr val="828282"/>
+                </a:solidFill>
+                <a:latin typeface="Arial"/>
+              </a:rPr>
+              <a:t>イエスよ、光の神よ</a:t>
+            </a:r>
+          </a:p>
+        </p:txBody>
+      </p:sp>
     </p:spTree>
   </p:cSld>
   <p:clrMapOvr>
@@ -3725,6 +3865,76 @@
                 <a:latin typeface="Arial"/>
               </a:rPr>
               <a:t>Que quiseste nascer nosso irmão</a:t>
+            </a:r>
+          </a:p>
+        </p:txBody>
+      </p:sp>
+      <p:sp>
+        <p:nvSpPr>
+          <p:cNvPr id="4" name="TextBox 3"/>
+          <p:cNvSpPr txBox="1"/>
+          <p:nvPr/>
+        </p:nvSpPr>
+        <p:spPr>
+          <a:xfrm>
+            <a:off x="640080" y="4128516"/>
+            <a:ext cx="10911535" cy="310896"/>
+          </a:xfrm>
+          <a:prstGeom prst="rect">
+            <a:avLst/>
+          </a:prstGeom>
+          <a:noFill/>
+        </p:spPr>
+        <p:txBody>
+          <a:bodyPr wrap="square">
+            <a:spAutoFit/>
+          </a:bodyPr>
+          <a:lstStyle/>
+          <a:p>
+            <a:pPr algn="ctr"/>
+            <a:r>
+              <a:rPr sz="2000" b="0" i="0">
+                <a:solidFill>
+                  <a:srgbClr val="828282"/>
+                </a:solidFill>
+                <a:latin typeface="Arial"/>
+              </a:rPr>
+              <a:t>あなたの心はなんと優しいことか</a:t>
+            </a:r>
+          </a:p>
+        </p:txBody>
+      </p:sp>
+      <p:sp>
+        <p:nvSpPr>
+          <p:cNvPr id="5" name="TextBox 4"/>
+          <p:cNvSpPr txBox="1"/>
+          <p:nvPr/>
+        </p:nvSpPr>
+        <p:spPr>
+          <a:xfrm>
+            <a:off x="640080" y="4494276"/>
+            <a:ext cx="10911535" cy="310896"/>
+          </a:xfrm>
+          <a:prstGeom prst="rect">
+            <a:avLst/>
+          </a:prstGeom>
+          <a:noFill/>
+        </p:spPr>
+        <p:txBody>
+          <a:bodyPr wrap="square">
+            <a:spAutoFit/>
+          </a:bodyPr>
+          <a:lstStyle/>
+          <a:p>
+            <a:pPr algn="ctr"/>
+            <a:r>
+              <a:rPr sz="2000" b="0" i="0">
+                <a:solidFill>
+                  <a:srgbClr val="828282"/>
+                </a:solidFill>
+                <a:latin typeface="Arial"/>
+              </a:rPr>
+              <a:t>私たちの兄弟として生まれることを望まれた</a:t>
             </a:r>
           </a:p>
         </p:txBody>
